--- a/Velo en libre service/Etude_de_cas_cyclistic.pptx
+++ b/Velo en libre service/Etude_de_cas_cyclistic.pptx
@@ -6,6 +6,10 @@
   </p:sldMasterIdLst>
   <p:sldIdLst>
     <p:sldId id="256" r:id="rId2"/>
+    <p:sldId id="257" r:id="rId3"/>
+    <p:sldId id="258" r:id="rId4"/>
+    <p:sldId id="259" r:id="rId5"/>
+    <p:sldId id="260" r:id="rId6"/>
   </p:sldIdLst>
   <p:sldSz cx="12192000" cy="6858000"/>
   <p:notesSz cx="6858000" cy="9144000"/>
@@ -104,6 +108,11 @@
       </a:defRPr>
     </a:lvl9pPr>
   </p:defaultTextStyle>
+  <p:extLst>
+    <p:ext uri="{EFAFB233-063F-42B5-8137-9DF3F51BA10A}">
+      <p15:sldGuideLst xmlns:p15="http://schemas.microsoft.com/office/powerpoint/2012/main"/>
+    </p:ext>
+  </p:extLst>
 </p:presentation>
 </file>
 
@@ -3344,8 +3353,13 @@
           <a:p>
             <a:r>
               <a:rPr lang="fr-FR" dirty="0"/>
-              <a:t>Vélo en libre service</a:t>
-            </a:r>
+              <a:t>Vélo en libre service </a:t>
+            </a:r>
+            <a:r>
+              <a:rPr lang="fr-FR" dirty="0" err="1"/>
+              <a:t>Cyclistic</a:t>
+            </a:r>
+            <a:endParaRPr lang="fr-FR" dirty="0"/>
           </a:p>
         </p:txBody>
       </p:sp>
@@ -3377,7 +3391,7 @@
           </a:p>
           <a:p>
             <a:r>
-              <a:rPr lang="fr-FR"/>
+              <a:rPr lang="fr-FR" dirty="0"/>
               <a:t>Le 16 Mai 2026</a:t>
             </a:r>
           </a:p>
@@ -3387,6 +3401,326 @@
     <p:extLst>
       <p:ext uri="{BB962C8B-B14F-4D97-AF65-F5344CB8AC3E}">
         <p14:creationId xmlns:p14="http://schemas.microsoft.com/office/powerpoint/2010/main" val="3422585109"/>
+      </p:ext>
+    </p:extLst>
+  </p:cSld>
+  <p:clrMapOvr>
+    <a:masterClrMapping/>
+  </p:clrMapOvr>
+</p:sld>
+</file>
+
+<file path=ppt/slides/slide2.xml><?xml version="1.0" encoding="utf-8"?>
+<p:sld xmlns:a="http://schemas.openxmlformats.org/drawingml/2006/main" xmlns:r="http://schemas.openxmlformats.org/officeDocument/2006/relationships" xmlns:p="http://schemas.openxmlformats.org/presentationml/2006/main">
+  <p:cSld>
+    <p:spTree>
+      <p:nvGrpSpPr>
+        <p:cNvPr id="1" name=""/>
+        <p:cNvGrpSpPr/>
+        <p:nvPr/>
+      </p:nvGrpSpPr>
+      <p:grpSpPr>
+        <a:xfrm>
+          <a:off x="0" y="0"/>
+          <a:ext cx="0" cy="0"/>
+          <a:chOff x="0" y="0"/>
+          <a:chExt cx="0" cy="0"/>
+        </a:xfrm>
+      </p:grpSpPr>
+      <p:sp>
+        <p:nvSpPr>
+          <p:cNvPr id="2" name="Titre 1">
+            <a:extLst>
+              <a:ext uri="{FF2B5EF4-FFF2-40B4-BE49-F238E27FC236}">
+                <a16:creationId xmlns:a16="http://schemas.microsoft.com/office/drawing/2014/main" id="{55589F1D-A246-79CB-8F6D-9513EC545437}"/>
+              </a:ext>
+            </a:extLst>
+          </p:cNvPr>
+          <p:cNvSpPr>
+            <a:spLocks noGrp="1"/>
+          </p:cNvSpPr>
+          <p:nvPr>
+            <p:ph type="title"/>
+          </p:nvPr>
+        </p:nvSpPr>
+        <p:spPr/>
+        <p:txBody>
+          <a:bodyPr/>
+          <a:lstStyle/>
+          <a:p>
+            <a:endParaRPr lang="fr-FR"/>
+          </a:p>
+        </p:txBody>
+      </p:sp>
+      <p:sp>
+        <p:nvSpPr>
+          <p:cNvPr id="3" name="Espace réservé du contenu 2">
+            <a:extLst>
+              <a:ext uri="{FF2B5EF4-FFF2-40B4-BE49-F238E27FC236}">
+                <a16:creationId xmlns:a16="http://schemas.microsoft.com/office/drawing/2014/main" id="{12AA23CF-3276-8ED5-8D5E-E9EDD6361FD3}"/>
+              </a:ext>
+            </a:extLst>
+          </p:cNvPr>
+          <p:cNvSpPr>
+            <a:spLocks noGrp="1"/>
+          </p:cNvSpPr>
+          <p:nvPr>
+            <p:ph idx="1"/>
+          </p:nvPr>
+        </p:nvSpPr>
+        <p:spPr/>
+        <p:txBody>
+          <a:bodyPr/>
+          <a:lstStyle/>
+          <a:p>
+            <a:endParaRPr lang="fr-FR"/>
+          </a:p>
+        </p:txBody>
+      </p:sp>
+    </p:spTree>
+    <p:extLst>
+      <p:ext uri="{BB962C8B-B14F-4D97-AF65-F5344CB8AC3E}">
+        <p14:creationId xmlns:p14="http://schemas.microsoft.com/office/powerpoint/2010/main" val="1972986352"/>
+      </p:ext>
+    </p:extLst>
+  </p:cSld>
+  <p:clrMapOvr>
+    <a:masterClrMapping/>
+  </p:clrMapOvr>
+</p:sld>
+</file>
+
+<file path=ppt/slides/slide3.xml><?xml version="1.0" encoding="utf-8"?>
+<p:sld xmlns:a="http://schemas.openxmlformats.org/drawingml/2006/main" xmlns:r="http://schemas.openxmlformats.org/officeDocument/2006/relationships" xmlns:p="http://schemas.openxmlformats.org/presentationml/2006/main">
+  <p:cSld>
+    <p:spTree>
+      <p:nvGrpSpPr>
+        <p:cNvPr id="1" name=""/>
+        <p:cNvGrpSpPr/>
+        <p:nvPr/>
+      </p:nvGrpSpPr>
+      <p:grpSpPr>
+        <a:xfrm>
+          <a:off x="0" y="0"/>
+          <a:ext cx="0" cy="0"/>
+          <a:chOff x="0" y="0"/>
+          <a:chExt cx="0" cy="0"/>
+        </a:xfrm>
+      </p:grpSpPr>
+      <p:sp>
+        <p:nvSpPr>
+          <p:cNvPr id="2" name="Titre 1">
+            <a:extLst>
+              <a:ext uri="{FF2B5EF4-FFF2-40B4-BE49-F238E27FC236}">
+                <a16:creationId xmlns:a16="http://schemas.microsoft.com/office/drawing/2014/main" id="{EFFDD1AE-2DDB-8EA7-AFEC-9BB65EBD5B2E}"/>
+              </a:ext>
+            </a:extLst>
+          </p:cNvPr>
+          <p:cNvSpPr>
+            <a:spLocks noGrp="1"/>
+          </p:cNvSpPr>
+          <p:nvPr>
+            <p:ph type="title"/>
+          </p:nvPr>
+        </p:nvSpPr>
+        <p:spPr/>
+        <p:txBody>
+          <a:bodyPr/>
+          <a:lstStyle/>
+          <a:p>
+            <a:endParaRPr lang="fr-FR"/>
+          </a:p>
+        </p:txBody>
+      </p:sp>
+      <p:sp>
+        <p:nvSpPr>
+          <p:cNvPr id="3" name="Espace réservé du contenu 2">
+            <a:extLst>
+              <a:ext uri="{FF2B5EF4-FFF2-40B4-BE49-F238E27FC236}">
+                <a16:creationId xmlns:a16="http://schemas.microsoft.com/office/drawing/2014/main" id="{989203E8-A09C-5D51-4248-9ACC8D450434}"/>
+              </a:ext>
+            </a:extLst>
+          </p:cNvPr>
+          <p:cNvSpPr>
+            <a:spLocks noGrp="1"/>
+          </p:cNvSpPr>
+          <p:nvPr>
+            <p:ph idx="1"/>
+          </p:nvPr>
+        </p:nvSpPr>
+        <p:spPr/>
+        <p:txBody>
+          <a:bodyPr/>
+          <a:lstStyle/>
+          <a:p>
+            <a:endParaRPr lang="fr-FR"/>
+          </a:p>
+        </p:txBody>
+      </p:sp>
+    </p:spTree>
+    <p:extLst>
+      <p:ext uri="{BB962C8B-B14F-4D97-AF65-F5344CB8AC3E}">
+        <p14:creationId xmlns:p14="http://schemas.microsoft.com/office/powerpoint/2010/main" val="789833125"/>
+      </p:ext>
+    </p:extLst>
+  </p:cSld>
+  <p:clrMapOvr>
+    <a:masterClrMapping/>
+  </p:clrMapOvr>
+</p:sld>
+</file>
+
+<file path=ppt/slides/slide4.xml><?xml version="1.0" encoding="utf-8"?>
+<p:sld xmlns:a="http://schemas.openxmlformats.org/drawingml/2006/main" xmlns:r="http://schemas.openxmlformats.org/officeDocument/2006/relationships" xmlns:p="http://schemas.openxmlformats.org/presentationml/2006/main">
+  <p:cSld>
+    <p:spTree>
+      <p:nvGrpSpPr>
+        <p:cNvPr id="1" name=""/>
+        <p:cNvGrpSpPr/>
+        <p:nvPr/>
+      </p:nvGrpSpPr>
+      <p:grpSpPr>
+        <a:xfrm>
+          <a:off x="0" y="0"/>
+          <a:ext cx="0" cy="0"/>
+          <a:chOff x="0" y="0"/>
+          <a:chExt cx="0" cy="0"/>
+        </a:xfrm>
+      </p:grpSpPr>
+      <p:sp>
+        <p:nvSpPr>
+          <p:cNvPr id="2" name="Titre 1">
+            <a:extLst>
+              <a:ext uri="{FF2B5EF4-FFF2-40B4-BE49-F238E27FC236}">
+                <a16:creationId xmlns:a16="http://schemas.microsoft.com/office/drawing/2014/main" id="{1E9DC683-7A8A-B7EE-2FEE-67C04E3FC65D}"/>
+              </a:ext>
+            </a:extLst>
+          </p:cNvPr>
+          <p:cNvSpPr>
+            <a:spLocks noGrp="1"/>
+          </p:cNvSpPr>
+          <p:nvPr>
+            <p:ph type="title"/>
+          </p:nvPr>
+        </p:nvSpPr>
+        <p:spPr/>
+        <p:txBody>
+          <a:bodyPr/>
+          <a:lstStyle/>
+          <a:p>
+            <a:endParaRPr lang="fr-FR"/>
+          </a:p>
+        </p:txBody>
+      </p:sp>
+      <p:sp>
+        <p:nvSpPr>
+          <p:cNvPr id="3" name="Espace réservé du contenu 2">
+            <a:extLst>
+              <a:ext uri="{FF2B5EF4-FFF2-40B4-BE49-F238E27FC236}">
+                <a16:creationId xmlns:a16="http://schemas.microsoft.com/office/drawing/2014/main" id="{30F3B2C7-9BF6-16E5-1F62-DA8B1E781424}"/>
+              </a:ext>
+            </a:extLst>
+          </p:cNvPr>
+          <p:cNvSpPr>
+            <a:spLocks noGrp="1"/>
+          </p:cNvSpPr>
+          <p:nvPr>
+            <p:ph idx="1"/>
+          </p:nvPr>
+        </p:nvSpPr>
+        <p:spPr/>
+        <p:txBody>
+          <a:bodyPr/>
+          <a:lstStyle/>
+          <a:p>
+            <a:endParaRPr lang="fr-FR"/>
+          </a:p>
+        </p:txBody>
+      </p:sp>
+    </p:spTree>
+    <p:extLst>
+      <p:ext uri="{BB962C8B-B14F-4D97-AF65-F5344CB8AC3E}">
+        <p14:creationId xmlns:p14="http://schemas.microsoft.com/office/powerpoint/2010/main" val="1878146245"/>
+      </p:ext>
+    </p:extLst>
+  </p:cSld>
+  <p:clrMapOvr>
+    <a:masterClrMapping/>
+  </p:clrMapOvr>
+</p:sld>
+</file>
+
+<file path=ppt/slides/slide5.xml><?xml version="1.0" encoding="utf-8"?>
+<p:sld xmlns:a="http://schemas.openxmlformats.org/drawingml/2006/main" xmlns:r="http://schemas.openxmlformats.org/officeDocument/2006/relationships" xmlns:p="http://schemas.openxmlformats.org/presentationml/2006/main">
+  <p:cSld>
+    <p:spTree>
+      <p:nvGrpSpPr>
+        <p:cNvPr id="1" name=""/>
+        <p:cNvGrpSpPr/>
+        <p:nvPr/>
+      </p:nvGrpSpPr>
+      <p:grpSpPr>
+        <a:xfrm>
+          <a:off x="0" y="0"/>
+          <a:ext cx="0" cy="0"/>
+          <a:chOff x="0" y="0"/>
+          <a:chExt cx="0" cy="0"/>
+        </a:xfrm>
+      </p:grpSpPr>
+      <p:sp>
+        <p:nvSpPr>
+          <p:cNvPr id="2" name="Titre 1">
+            <a:extLst>
+              <a:ext uri="{FF2B5EF4-FFF2-40B4-BE49-F238E27FC236}">
+                <a16:creationId xmlns:a16="http://schemas.microsoft.com/office/drawing/2014/main" id="{14E86E37-5D2C-0BF6-676B-4D1BCEB1C272}"/>
+              </a:ext>
+            </a:extLst>
+          </p:cNvPr>
+          <p:cNvSpPr>
+            <a:spLocks noGrp="1"/>
+          </p:cNvSpPr>
+          <p:nvPr>
+            <p:ph type="title"/>
+          </p:nvPr>
+        </p:nvSpPr>
+        <p:spPr/>
+        <p:txBody>
+          <a:bodyPr/>
+          <a:lstStyle/>
+          <a:p>
+            <a:endParaRPr lang="fr-FR"/>
+          </a:p>
+        </p:txBody>
+      </p:sp>
+      <p:sp>
+        <p:nvSpPr>
+          <p:cNvPr id="3" name="Espace réservé du contenu 2">
+            <a:extLst>
+              <a:ext uri="{FF2B5EF4-FFF2-40B4-BE49-F238E27FC236}">
+                <a16:creationId xmlns:a16="http://schemas.microsoft.com/office/drawing/2014/main" id="{2B8EEF60-9E27-91D9-3463-4B63EB624953}"/>
+              </a:ext>
+            </a:extLst>
+          </p:cNvPr>
+          <p:cNvSpPr>
+            <a:spLocks noGrp="1"/>
+          </p:cNvSpPr>
+          <p:nvPr>
+            <p:ph idx="1"/>
+          </p:nvPr>
+        </p:nvSpPr>
+        <p:spPr/>
+        <p:txBody>
+          <a:bodyPr/>
+          <a:lstStyle/>
+          <a:p>
+            <a:endParaRPr lang="fr-FR" dirty="0"/>
+          </a:p>
+        </p:txBody>
+      </p:sp>
+    </p:spTree>
+    <p:extLst>
+      <p:ext uri="{BB962C8B-B14F-4D97-AF65-F5344CB8AC3E}">
+        <p14:creationId xmlns:p14="http://schemas.microsoft.com/office/powerpoint/2010/main" val="1504502749"/>
       </p:ext>
     </p:extLst>
   </p:cSld>

--- a/Velo en libre service/Etude_de_cas_cyclistic.pptx
+++ b/Velo en libre service/Etude_de_cas_cyclistic.pptx
@@ -22236,7 +22236,7 @@
         <p:spPr>
           <a:xfrm>
             <a:off x="1524000" y="-1193800"/>
-            <a:ext cx="9144000" cy="2387600"/>
+            <a:ext cx="9753600" cy="2387600"/>
           </a:xfrm>
         </p:spPr>
         <p:txBody>
@@ -22245,7 +22245,7 @@
           <a:p>
             <a:r>
               <a:rPr lang="fr-FR" dirty="0"/>
-              <a:t>Vélo en libre service </a:t>
+              <a:t>Vélos en libre service </a:t>
             </a:r>
             <a:r>
               <a:rPr lang="fr-FR" dirty="0" err="1"/>
@@ -22383,7 +22383,7 @@
           <a:p>
             <a:r>
               <a:rPr lang="fr-FR" dirty="0"/>
-              <a:t>Station </a:t>
+              <a:t>Stations </a:t>
             </a:r>
             <a:r>
               <a:rPr lang="fr-FR" sz="4400" b="0" i="0" u="none" strike="noStrike" dirty="0">
@@ -22485,7 +22485,7 @@
           <a:p>
             <a:r>
               <a:rPr lang="fr-FR" dirty="0"/>
-              <a:t>Différence entre Vélo retiré et vélo déposé par stations et par mois</a:t>
+              <a:t>Différence entre dépôt et retrait de vélo par mois</a:t>
             </a:r>
           </a:p>
         </p:txBody>
@@ -26972,10 +26972,9 @@
             </a:lvl1pPr>
           </a:lstStyle>
           <a:p>
-            <a:pPr algn="ctr"/>
             <a:r>
               <a:rPr lang="fr-FR" dirty="0"/>
-              <a:t>Différence entre Vélos retirés et vélos déposés par stations et par mois (suite)</a:t>
+              <a:t>Différence entre dépôt et retrait de vélo par mois (suite)</a:t>
             </a:r>
           </a:p>
         </p:txBody>
@@ -27723,7 +27722,7 @@
           <a:p>
             <a:r>
               <a:rPr lang="fr-FR" dirty="0"/>
-              <a:t>Présentation des donnés</a:t>
+              <a:t>Présentation des données</a:t>
             </a:r>
           </a:p>
           <a:p>
@@ -28248,7 +28247,7 @@
           <a:p>
             <a:r>
               <a:rPr lang="fr-FR" dirty="0"/>
-              <a:t>Part d’utilisation des vélo par catégories d’</a:t>
+              <a:t>Part d’utilisation des vélo par catégories d’ </a:t>
             </a:r>
             <a:r>
               <a:rPr lang="fr-FR" dirty="0" err="1"/>
@@ -28573,7 +28572,7 @@
           <a:p>
             <a:r>
               <a:rPr lang="fr-FR" dirty="0"/>
-              <a:t>Durée moyenne trajet et jour préféré selon le mois </a:t>
+              <a:t>Durée moyenne de trajet et jour préféré selon le mois </a:t>
             </a:r>
           </a:p>
         </p:txBody>

--- a/Velo en libre service/Etude_de_cas_cyclistic.pptx
+++ b/Velo en libre service/Etude_de_cas_cyclistic.pptx
@@ -3262,8 +3262,8 @@
         </p:nvSpPr>
         <p:spPr>
           <a:xfrm rot="0">
-            <a:off x="7648646" y="3841418"/>
-            <a:ext cx="8594428" cy="533399"/>
+            <a:off x="7648646" y="3850943"/>
+            <a:ext cx="8594428" cy="523874"/>
           </a:xfrm>
           <a:prstGeom prst="rect">
             <a:avLst/>
@@ -3306,8 +3306,8 @@
         </p:nvSpPr>
         <p:spPr>
           <a:xfrm rot="0">
-            <a:off x="7648646" y="5840404"/>
-            <a:ext cx="8815315" cy="1600199"/>
+            <a:off x="7648646" y="5849929"/>
+            <a:ext cx="8815315" cy="1590674"/>
           </a:xfrm>
           <a:prstGeom prst="rect">
             <a:avLst/>
@@ -3360,8 +3360,8 @@
         </p:nvSpPr>
         <p:spPr>
           <a:xfrm rot="0">
-            <a:off x="7648646" y="1028065"/>
-            <a:ext cx="4407658" cy="533399"/>
+            <a:off x="7648646" y="1037590"/>
+            <a:ext cx="4407658" cy="523874"/>
           </a:xfrm>
           <a:prstGeom prst="rect">
             <a:avLst/>
@@ -3404,8 +3404,8 @@
         </p:nvSpPr>
         <p:spPr>
           <a:xfrm rot="0">
-            <a:off x="14259549" y="1028065"/>
-            <a:ext cx="2840251" cy="533399"/>
+            <a:off x="14259549" y="1037590"/>
+            <a:ext cx="2840251" cy="523874"/>
           </a:xfrm>
           <a:prstGeom prst="rect">
             <a:avLst/>
@@ -3823,8 +3823,8 @@
           </p:nvSpPr>
           <p:spPr>
             <a:xfrm>
-              <a:off x="0" y="-38100"/>
-              <a:ext cx="2126912" cy="679490"/>
+              <a:off x="0" y="-28575"/>
+              <a:ext cx="2126912" cy="669965"/>
             </a:xfrm>
             <a:prstGeom prst="rect">
               <a:avLst/>
@@ -4382,8 +4382,8 @@
           </p:nvSpPr>
           <p:spPr>
             <a:xfrm>
-              <a:off x="0" y="-38100"/>
-              <a:ext cx="2126912" cy="566443"/>
+              <a:off x="0" y="-28575"/>
+              <a:ext cx="2126912" cy="556918"/>
             </a:xfrm>
             <a:prstGeom prst="rect">
               <a:avLst/>
@@ -4615,8 +4615,8 @@
         </p:nvSpPr>
         <p:spPr>
           <a:xfrm rot="0">
-            <a:off x="1028700" y="1128712"/>
-            <a:ext cx="13390349" cy="698499"/>
+            <a:off x="1028700" y="1138237"/>
+            <a:ext cx="13390349" cy="688974"/>
           </a:xfrm>
           <a:prstGeom prst="rect">
             <a:avLst/>
@@ -4827,8 +4827,8 @@
         </p:nvSpPr>
         <p:spPr>
           <a:xfrm rot="0">
-            <a:off x="11156791" y="2928117"/>
-            <a:ext cx="4643382" cy="533399"/>
+            <a:off x="11156791" y="2937642"/>
+            <a:ext cx="4643382" cy="523874"/>
           </a:xfrm>
           <a:prstGeom prst="rect">
             <a:avLst/>
@@ -5064,8 +5064,8 @@
           </p:nvSpPr>
           <p:spPr>
             <a:xfrm>
-              <a:off x="0" y="-38100"/>
-              <a:ext cx="2126912" cy="566443"/>
+              <a:off x="0" y="-28575"/>
+              <a:ext cx="2126912" cy="556918"/>
             </a:xfrm>
             <a:prstGeom prst="rect">
               <a:avLst/>
@@ -5308,8 +5308,8 @@
         </p:nvSpPr>
         <p:spPr>
           <a:xfrm rot="0">
-            <a:off x="934034" y="1510348"/>
-            <a:ext cx="6208486" cy="698499"/>
+            <a:off x="1028700" y="5284788"/>
+            <a:ext cx="6208486" cy="688974"/>
           </a:xfrm>
           <a:prstGeom prst="rect">
             <a:avLst/>
@@ -5352,8 +5352,8 @@
         </p:nvSpPr>
         <p:spPr>
           <a:xfrm rot="0">
-            <a:off x="7999792" y="1637348"/>
-            <a:ext cx="4643382" cy="1066799"/>
+            <a:off x="7999792" y="1646873"/>
+            <a:ext cx="4643382" cy="1057274"/>
           </a:xfrm>
           <a:prstGeom prst="rect">
             <a:avLst/>
@@ -5911,8 +5911,8 @@
         </p:nvSpPr>
         <p:spPr>
           <a:xfrm rot="0">
-            <a:off x="7999792" y="1637348"/>
-            <a:ext cx="2071629" cy="533399"/>
+            <a:off x="7999792" y="1646873"/>
+            <a:ext cx="2071629" cy="523874"/>
           </a:xfrm>
           <a:prstGeom prst="rect">
             <a:avLst/>
@@ -5955,8 +5955,8 @@
         </p:nvSpPr>
         <p:spPr>
           <a:xfrm rot="0">
-            <a:off x="7999792" y="4380071"/>
-            <a:ext cx="2071629" cy="533399"/>
+            <a:off x="7999792" y="4389596"/>
+            <a:ext cx="2071629" cy="523874"/>
           </a:xfrm>
           <a:prstGeom prst="rect">
             <a:avLst/>
@@ -5999,8 +5999,8 @@
         </p:nvSpPr>
         <p:spPr>
           <a:xfrm rot="0">
-            <a:off x="7999792" y="7122795"/>
-            <a:ext cx="2071629" cy="533399"/>
+            <a:off x="7999792" y="7132320"/>
+            <a:ext cx="2071629" cy="523874"/>
           </a:xfrm>
           <a:prstGeom prst="rect">
             <a:avLst/>
@@ -6043,8 +6043,8 @@
         </p:nvSpPr>
         <p:spPr>
           <a:xfrm rot="0">
-            <a:off x="12801680" y="1637348"/>
-            <a:ext cx="2071629" cy="533399"/>
+            <a:off x="12801680" y="1646873"/>
+            <a:ext cx="2071629" cy="523874"/>
           </a:xfrm>
           <a:prstGeom prst="rect">
             <a:avLst/>
@@ -6087,8 +6087,8 @@
         </p:nvSpPr>
         <p:spPr>
           <a:xfrm rot="0">
-            <a:off x="12801680" y="4380071"/>
-            <a:ext cx="2071629" cy="533399"/>
+            <a:off x="12801680" y="4389596"/>
+            <a:ext cx="2071629" cy="523874"/>
           </a:xfrm>
           <a:prstGeom prst="rect">
             <a:avLst/>
@@ -6132,7 +6132,7 @@
         <p:spPr>
           <a:xfrm rot="0">
             <a:off x="7999792" y="2472371"/>
-            <a:ext cx="4457620" cy="1063625"/>
+            <a:ext cx="4457620" cy="1308100"/>
           </a:xfrm>
           <a:prstGeom prst="rect">
             <a:avLst/>
@@ -6146,11 +6146,11 @@
           <a:p>
             <a:pPr algn="l">
               <a:lnSpc>
-                <a:spcPts val="2800"/>
+                <a:spcPts val="3499"/>
               </a:lnSpc>
             </a:pPr>
             <a:r>
-              <a:rPr lang="en-US" b="true" sz="2000" i="true" spc="40">
+              <a:rPr lang="en-US" b="true" sz="2499" i="true" spc="49">
                 <a:solidFill>
                   <a:srgbClr val="895159"/>
                 </a:solidFill>
@@ -6165,7 +6165,7 @@
           <a:p>
             <a:pPr algn="l" marL="0" indent="0" lvl="0">
               <a:lnSpc>
-                <a:spcPts val="2800"/>
+                <a:spcPts val="3499"/>
               </a:lnSpc>
               <a:spcBef>
                 <a:spcPct val="0"/>
@@ -6183,7 +6183,7 @@
         <p:spPr>
           <a:xfrm rot="0">
             <a:off x="7999792" y="5086350"/>
-            <a:ext cx="4457620" cy="1416050"/>
+            <a:ext cx="4457620" cy="2184400"/>
           </a:xfrm>
           <a:prstGeom prst="rect">
             <a:avLst/>
@@ -6197,14 +6197,14 @@
           <a:p>
             <a:pPr algn="l" marL="0" indent="0" lvl="0">
               <a:lnSpc>
-                <a:spcPts val="2800"/>
+                <a:spcPts val="3499"/>
               </a:lnSpc>
               <a:spcBef>
                 <a:spcPct val="0"/>
               </a:spcBef>
             </a:pPr>
             <a:r>
-              <a:rPr lang="en-US" b="true" sz="2000" i="true" spc="40">
+              <a:rPr lang="en-US" b="true" sz="2499" i="true" spc="49">
                 <a:solidFill>
                   <a:srgbClr val="895159"/>
                 </a:solidFill>
@@ -6219,7 +6219,7 @@
           <a:p>
             <a:pPr algn="l" marL="0" indent="0" lvl="0">
               <a:lnSpc>
-                <a:spcPts val="2800"/>
+                <a:spcPts val="3499"/>
               </a:lnSpc>
               <a:spcBef>
                 <a:spcPct val="0"/>
@@ -6237,7 +6237,7 @@
         <p:spPr>
           <a:xfrm rot="0">
             <a:off x="7999792" y="7827644"/>
-            <a:ext cx="4457620" cy="1416050"/>
+            <a:ext cx="4457620" cy="1746250"/>
           </a:xfrm>
           <a:prstGeom prst="rect">
             <a:avLst/>
@@ -6251,11 +6251,11 @@
           <a:p>
             <a:pPr algn="l">
               <a:lnSpc>
-                <a:spcPts val="2800"/>
+                <a:spcPts val="3499"/>
               </a:lnSpc>
             </a:pPr>
             <a:r>
-              <a:rPr lang="en-US" b="true" sz="2000" i="true" spc="40">
+              <a:rPr lang="en-US" b="true" sz="2499" i="true" spc="49">
                 <a:solidFill>
                   <a:srgbClr val="895159"/>
                 </a:solidFill>
@@ -6270,7 +6270,7 @@
           <a:p>
             <a:pPr algn="l" marL="0" indent="0" lvl="0">
               <a:lnSpc>
-                <a:spcPts val="2800"/>
+                <a:spcPts val="3499"/>
               </a:lnSpc>
               <a:spcBef>
                 <a:spcPct val="0"/>
@@ -6288,7 +6288,7 @@
         <p:spPr>
           <a:xfrm rot="0">
             <a:off x="12801680" y="2472371"/>
-            <a:ext cx="4457620" cy="1063625"/>
+            <a:ext cx="4457620" cy="1746250"/>
           </a:xfrm>
           <a:prstGeom prst="rect">
             <a:avLst/>
@@ -6302,11 +6302,11 @@
           <a:p>
             <a:pPr algn="l">
               <a:lnSpc>
-                <a:spcPts val="2800"/>
+                <a:spcPts val="3499"/>
               </a:lnSpc>
             </a:pPr>
             <a:r>
-              <a:rPr lang="en-US" b="true" sz="2000" i="true" spc="40">
+              <a:rPr lang="en-US" b="true" sz="2499" i="true" spc="49">
                 <a:solidFill>
                   <a:srgbClr val="895159"/>
                 </a:solidFill>
@@ -6321,7 +6321,7 @@
           <a:p>
             <a:pPr algn="l" marL="0" indent="0" lvl="0">
               <a:lnSpc>
-                <a:spcPts val="2800"/>
+                <a:spcPts val="3499"/>
               </a:lnSpc>
               <a:spcBef>
                 <a:spcPct val="0"/>
@@ -6339,7 +6339,7 @@
         <p:spPr>
           <a:xfrm rot="0">
             <a:off x="12801680" y="5111750"/>
-            <a:ext cx="4457620" cy="1063625"/>
+            <a:ext cx="4457620" cy="1308100"/>
           </a:xfrm>
           <a:prstGeom prst="rect">
             <a:avLst/>
@@ -6353,11 +6353,11 @@
           <a:p>
             <a:pPr algn="l">
               <a:lnSpc>
-                <a:spcPts val="2800"/>
+                <a:spcPts val="3499"/>
               </a:lnSpc>
             </a:pPr>
             <a:r>
-              <a:rPr lang="en-US" b="true" sz="2000" i="true" spc="40">
+              <a:rPr lang="en-US" b="true" sz="2499" i="true" spc="49">
                 <a:solidFill>
                   <a:srgbClr val="895159"/>
                 </a:solidFill>
@@ -6372,7 +6372,7 @@
           <a:p>
             <a:pPr algn="l" marL="0" indent="0" lvl="0">
               <a:lnSpc>
-                <a:spcPts val="2800"/>
+                <a:spcPts val="3499"/>
               </a:lnSpc>
               <a:spcBef>
                 <a:spcPct val="0"/>
@@ -6536,8 +6536,8 @@
         </p:nvSpPr>
         <p:spPr>
           <a:xfrm rot="0">
-            <a:off x="934034" y="1510348"/>
-            <a:ext cx="6208486" cy="698499"/>
+            <a:off x="1161373" y="5320347"/>
+            <a:ext cx="6208486" cy="688974"/>
           </a:xfrm>
           <a:prstGeom prst="rect">
             <a:avLst/>
@@ -6933,8 +6933,8 @@
         </p:nvSpPr>
         <p:spPr>
           <a:xfrm rot="0">
-            <a:off x="7844049" y="2151697"/>
-            <a:ext cx="10106012" cy="7054850"/>
+            <a:off x="7733032" y="1446757"/>
+            <a:ext cx="9753190" cy="8474255"/>
           </a:xfrm>
           <a:prstGeom prst="rect">
             <a:avLst/>
@@ -6948,11 +6948,11 @@
           <a:p>
             <a:pPr algn="l">
               <a:lnSpc>
-                <a:spcPts val="2800"/>
+                <a:spcPts val="3079"/>
               </a:lnSpc>
             </a:pPr>
             <a:r>
-              <a:rPr lang="en-US" sz="2000" i="true" spc="40">
+              <a:rPr lang="en-US" sz="2199" i="true" spc="43">
                 <a:solidFill>
                   <a:srgbClr val="895159"/>
                 </a:solidFill>
@@ -6964,7 +6964,7 @@
               <a:t>•LES </a:t>
             </a:r>
             <a:r>
-              <a:rPr lang="en-US" b="true" sz="2000" i="true" spc="40">
+              <a:rPr lang="en-US" b="true" sz="2199" i="true" spc="43">
                 <a:solidFill>
                   <a:srgbClr val="895159"/>
                 </a:solidFill>
@@ -6976,7 +6976,7 @@
               <a:t>MEMBRES</a:t>
             </a:r>
             <a:r>
-              <a:rPr lang="en-US" sz="2000" i="true" spc="40">
+              <a:rPr lang="en-US" sz="2199" i="true" spc="43">
                 <a:solidFill>
                   <a:srgbClr val="895159"/>
                 </a:solidFill>
@@ -6988,7 +6988,7 @@
               <a:t> CONSTITUENT LE </a:t>
             </a:r>
             <a:r>
-              <a:rPr lang="en-US" b="true" sz="2000" i="true" spc="40">
+              <a:rPr lang="en-US" b="true" sz="2199" i="true" spc="43">
                 <a:solidFill>
                   <a:srgbClr val="895159"/>
                 </a:solidFill>
@@ -7000,7 +7000,7 @@
               <a:t>CŒUR DE L’ACTIVITÉ</a:t>
             </a:r>
             <a:r>
-              <a:rPr lang="en-US" sz="2000" i="true" spc="40">
+              <a:rPr lang="en-US" sz="2199" i="true" spc="43">
                 <a:solidFill>
                   <a:srgbClr val="895159"/>
                 </a:solidFill>
@@ -7012,7 +7012,7 @@
               <a:t>, REPRÉSENTANT</a:t>
             </a:r>
             <a:r>
-              <a:rPr lang="en-US" b="true" sz="2000" i="true" spc="40">
+              <a:rPr lang="en-US" b="true" sz="2199" i="true" spc="43">
                 <a:solidFill>
                   <a:srgbClr val="895159"/>
                 </a:solidFill>
@@ -7027,18 +7027,18 @@
           <a:p>
             <a:pPr algn="l">
               <a:lnSpc>
-                <a:spcPts val="2800"/>
+                <a:spcPts val="3079"/>
               </a:lnSpc>
             </a:pPr>
           </a:p>
           <a:p>
             <a:pPr algn="l">
               <a:lnSpc>
-                <a:spcPts val="2800"/>
+                <a:spcPts val="3079"/>
               </a:lnSpc>
             </a:pPr>
             <a:r>
-              <a:rPr lang="en-US" sz="2000" i="true" spc="40">
+              <a:rPr lang="en-US" sz="2199" i="true" spc="43">
                 <a:solidFill>
                   <a:srgbClr val="895159"/>
                 </a:solidFill>
@@ -7050,7 +7050,7 @@
               <a:t>•LES </a:t>
             </a:r>
             <a:r>
-              <a:rPr lang="en-US" b="true" sz="2000" i="true" spc="40">
+              <a:rPr lang="en-US" b="true" sz="2199" i="true" spc="43">
                 <a:solidFill>
                   <a:srgbClr val="895159"/>
                 </a:solidFill>
@@ -7062,7 +7062,7 @@
               <a:t>OCCASIONNELS</a:t>
             </a:r>
             <a:r>
-              <a:rPr lang="en-US" sz="2000" i="true" spc="40">
+              <a:rPr lang="en-US" sz="2199" i="true" spc="43">
                 <a:solidFill>
                   <a:srgbClr val="895159"/>
                 </a:solidFill>
@@ -7077,18 +7077,18 @@
           <a:p>
             <a:pPr algn="l">
               <a:lnSpc>
-                <a:spcPts val="2800"/>
+                <a:spcPts val="3079"/>
               </a:lnSpc>
             </a:pPr>
           </a:p>
           <a:p>
             <a:pPr algn="l">
               <a:lnSpc>
-                <a:spcPts val="2800"/>
+                <a:spcPts val="3079"/>
               </a:lnSpc>
             </a:pPr>
             <a:r>
-              <a:rPr lang="en-US" sz="2000" i="true" spc="40">
+              <a:rPr lang="en-US" sz="2199" i="true" spc="43">
                 <a:solidFill>
                   <a:srgbClr val="895159"/>
                 </a:solidFill>
@@ -7100,7 +7100,7 @@
               <a:t>•LES OCCASIONNELS UTILISENT PRINCIPALEMENT LE SERVICE </a:t>
             </a:r>
             <a:r>
-              <a:rPr lang="en-US" b="true" sz="2000" i="true" spc="40">
+              <a:rPr lang="en-US" b="true" sz="2199" i="true" spc="43">
                 <a:solidFill>
                   <a:srgbClr val="895159"/>
                 </a:solidFill>
@@ -7112,7 +7112,7 @@
               <a:t>EN ÉTÉ </a:t>
             </a:r>
             <a:r>
-              <a:rPr lang="en-US" sz="2000" i="true" spc="40">
+              <a:rPr lang="en-US" sz="2199" i="true" spc="43">
                 <a:solidFill>
                   <a:srgbClr val="895159"/>
                 </a:solidFill>
@@ -7124,7 +7124,7 @@
               <a:t>ET</a:t>
             </a:r>
             <a:r>
-              <a:rPr lang="en-US" b="true" sz="2000" i="true" spc="40">
+              <a:rPr lang="en-US" b="true" sz="2199" i="true" spc="43">
                 <a:solidFill>
                   <a:srgbClr val="895159"/>
                 </a:solidFill>
@@ -7136,7 +7136,7 @@
               <a:t> LE WEEK‑END</a:t>
             </a:r>
             <a:r>
-              <a:rPr lang="en-US" sz="2000" i="true" spc="40">
+              <a:rPr lang="en-US" sz="2199" i="true" spc="43">
                 <a:solidFill>
                   <a:srgbClr val="895159"/>
                 </a:solidFill>
@@ -7151,11 +7151,11 @@
           <a:p>
             <a:pPr algn="l">
               <a:lnSpc>
-                <a:spcPts val="2800"/>
+                <a:spcPts val="3079"/>
               </a:lnSpc>
             </a:pPr>
             <a:r>
-              <a:rPr lang="en-US" sz="2000" i="true" spc="40">
+              <a:rPr lang="en-US" sz="2199" i="true" spc="43">
                 <a:solidFill>
                   <a:srgbClr val="895159"/>
                 </a:solidFill>
@@ -7167,7 +7167,7 @@
               <a:t>         AVEC DES TRAJETS ÉGALEMENT </a:t>
             </a:r>
             <a:r>
-              <a:rPr lang="en-US" b="true" sz="2000" i="true" spc="40">
+              <a:rPr lang="en-US" b="true" sz="2199" i="true" spc="43">
                 <a:solidFill>
                   <a:srgbClr val="895159"/>
                 </a:solidFill>
@@ -7179,7 +7179,7 @@
               <a:t>DEUX FOIS PLUS LONGS</a:t>
             </a:r>
             <a:r>
-              <a:rPr lang="en-US" sz="2000" i="true" spc="40">
+              <a:rPr lang="en-US" sz="2199" i="true" spc="43">
                 <a:solidFill>
                   <a:srgbClr val="895159"/>
                 </a:solidFill>
@@ -7194,11 +7194,11 @@
           <a:p>
             <a:pPr algn="l">
               <a:lnSpc>
-                <a:spcPts val="2800"/>
+                <a:spcPts val="3079"/>
               </a:lnSpc>
             </a:pPr>
             <a:r>
-              <a:rPr lang="en-US" sz="2000" i="true" spc="40">
+              <a:rPr lang="en-US" sz="2199" i="true" spc="43">
                 <a:solidFill>
                   <a:srgbClr val="895159"/>
                 </a:solidFill>
@@ -7210,7 +7210,7 @@
               <a:t>•LES </a:t>
             </a:r>
             <a:r>
-              <a:rPr lang="en-US" b="true" sz="2000" i="true" spc="40">
+              <a:rPr lang="en-US" b="true" sz="2199" i="true" spc="43">
                 <a:solidFill>
                   <a:srgbClr val="895159"/>
                 </a:solidFill>
@@ -7222,7 +7222,7 @@
               <a:t>VÉLOS ÉLECTRIQUES</a:t>
             </a:r>
             <a:r>
-              <a:rPr lang="en-US" sz="2000" i="true" spc="40">
+              <a:rPr lang="en-US" sz="2199" i="true" spc="43">
                 <a:solidFill>
                   <a:srgbClr val="895159"/>
                 </a:solidFill>
@@ -7237,11 +7237,11 @@
           <a:p>
             <a:pPr algn="l">
               <a:lnSpc>
-                <a:spcPts val="2800"/>
+                <a:spcPts val="3079"/>
               </a:lnSpc>
             </a:pPr>
             <a:r>
-              <a:rPr lang="en-US" sz="2000" i="true" spc="40">
+              <a:rPr lang="en-US" sz="2199" i="true" spc="43">
                 <a:solidFill>
                   <a:srgbClr val="895159"/>
                 </a:solidFill>
@@ -7253,7 +7253,7 @@
               <a:t>         AVEC UNE </a:t>
             </a:r>
             <a:r>
-              <a:rPr lang="en-US" b="true" sz="2000" i="true" spc="40">
+              <a:rPr lang="en-US" b="true" sz="2199" i="true" spc="43">
                 <a:solidFill>
                   <a:srgbClr val="895159"/>
                 </a:solidFill>
@@ -7265,7 +7265,7 @@
               <a:t>TENDANCE À RENFORCER LEUR AVANCE</a:t>
             </a:r>
             <a:r>
-              <a:rPr lang="en-US" sz="2000" i="true" spc="40">
+              <a:rPr lang="en-US" sz="2199" i="true" spc="43">
                 <a:solidFill>
                   <a:srgbClr val="895159"/>
                 </a:solidFill>
@@ -7280,18 +7280,18 @@
           <a:p>
             <a:pPr algn="l">
               <a:lnSpc>
-                <a:spcPts val="2800"/>
+                <a:spcPts val="3079"/>
               </a:lnSpc>
             </a:pPr>
           </a:p>
           <a:p>
             <a:pPr algn="l">
               <a:lnSpc>
-                <a:spcPts val="2800"/>
+                <a:spcPts val="3079"/>
               </a:lnSpc>
             </a:pPr>
             <a:r>
-              <a:rPr lang="en-US" sz="2000" i="true" spc="40">
+              <a:rPr lang="en-US" sz="2199" i="true" spc="43">
                 <a:solidFill>
                   <a:srgbClr val="895159"/>
                 </a:solidFill>
@@ -7303,7 +7303,7 @@
               <a:t>•LA</a:t>
             </a:r>
             <a:r>
-              <a:rPr lang="en-US" b="true" sz="2000" i="true" spc="40">
+              <a:rPr lang="en-US" b="true" sz="2199" i="true" spc="43">
                 <a:solidFill>
                   <a:srgbClr val="895159"/>
                 </a:solidFill>
@@ -7315,7 +7315,7 @@
               <a:t> SAISONNALITÉ EST TRÈS MARQUÉE</a:t>
             </a:r>
             <a:r>
-              <a:rPr lang="en-US" sz="2000" i="true" spc="40">
+              <a:rPr lang="en-US" sz="2199" i="true" spc="43">
                 <a:solidFill>
                   <a:srgbClr val="895159"/>
                 </a:solidFill>
@@ -7327,7 +7327,7 @@
               <a:t>, AVEC UN </a:t>
             </a:r>
             <a:r>
-              <a:rPr lang="en-US" b="true" sz="2000" i="true" spc="40">
+              <a:rPr lang="en-US" b="true" sz="2199" i="true" spc="43">
                 <a:solidFill>
                   <a:srgbClr val="895159"/>
                 </a:solidFill>
@@ -7339,7 +7339,7 @@
               <a:t>PIC D’ACTIVITÉ ENTRE JUIN ET SEPTEMBRE, </a:t>
             </a:r>
             <a:r>
-              <a:rPr lang="en-US" sz="2000" i="true" spc="40">
+              <a:rPr lang="en-US" sz="2199" i="true" spc="43">
                 <a:solidFill>
                   <a:srgbClr val="895159"/>
                 </a:solidFill>
@@ -7351,7 +7351,7 @@
               <a:t>ET UNE </a:t>
             </a:r>
             <a:r>
-              <a:rPr lang="en-US" b="true" sz="2000" i="true" spc="40">
+              <a:rPr lang="en-US" b="true" sz="2199" i="true" spc="43">
                 <a:solidFill>
                   <a:srgbClr val="895159"/>
                 </a:solidFill>
@@ -7366,18 +7366,18 @@
           <a:p>
             <a:pPr algn="l">
               <a:lnSpc>
-                <a:spcPts val="2800"/>
+                <a:spcPts val="3079"/>
               </a:lnSpc>
             </a:pPr>
           </a:p>
           <a:p>
             <a:pPr algn="l">
               <a:lnSpc>
-                <a:spcPts val="2800"/>
+                <a:spcPts val="3079"/>
               </a:lnSpc>
             </a:pPr>
             <a:r>
-              <a:rPr lang="en-US" sz="2000" i="true" spc="40">
+              <a:rPr lang="en-US" sz="2199" i="true" spc="43">
                 <a:solidFill>
                   <a:srgbClr val="895159"/>
                 </a:solidFill>
@@ -7389,7 +7389,7 @@
               <a:t>•CERTAINES STATIONS NÉCESSITENT UNE </a:t>
             </a:r>
             <a:r>
-              <a:rPr lang="en-US" b="true" sz="2000" i="true" spc="40">
+              <a:rPr lang="en-US" b="true" sz="2199" i="true" spc="43">
                 <a:solidFill>
                   <a:srgbClr val="895159"/>
                 </a:solidFill>
@@ -7404,18 +7404,18 @@
           <a:p>
             <a:pPr algn="l">
               <a:lnSpc>
-                <a:spcPts val="2800"/>
+                <a:spcPts val="3079"/>
               </a:lnSpc>
             </a:pPr>
           </a:p>
           <a:p>
             <a:pPr algn="l">
               <a:lnSpc>
-                <a:spcPts val="2800"/>
+                <a:spcPts val="3079"/>
               </a:lnSpc>
             </a:pPr>
             <a:r>
-              <a:rPr lang="en-US" sz="2000" i="true" spc="40">
+              <a:rPr lang="en-US" sz="2199" i="true" spc="43">
                 <a:solidFill>
                   <a:srgbClr val="895159"/>
                 </a:solidFill>
@@ -7427,7 +7427,7 @@
               <a:t>•UN </a:t>
             </a:r>
             <a:r>
-              <a:rPr lang="en-US" b="true" sz="2000" i="true" spc="40">
+              <a:rPr lang="en-US" b="true" sz="2199" i="true" spc="43">
                 <a:solidFill>
                   <a:srgbClr val="895159"/>
                 </a:solidFill>
@@ -7439,7 +7439,7 @@
               <a:t>DÉSÉQUILIBRE NOTABLE</a:t>
             </a:r>
             <a:r>
-              <a:rPr lang="en-US" sz="2000" i="true" spc="40">
+              <a:rPr lang="en-US" sz="2199" i="true" spc="43">
                 <a:solidFill>
                   <a:srgbClr val="895159"/>
                 </a:solidFill>
@@ -7451,7 +7451,7 @@
               <a:t> EXISTE ENTRE STATIONS, NÉCESSITANT UN </a:t>
             </a:r>
             <a:r>
-              <a:rPr lang="en-US" b="true" sz="2000" i="true" spc="40">
+              <a:rPr lang="en-US" b="true" sz="2199" i="true" spc="43">
                 <a:solidFill>
                   <a:srgbClr val="895159"/>
                 </a:solidFill>
@@ -7466,7 +7466,7 @@
           <a:p>
             <a:pPr algn="l" marL="0" indent="0" lvl="0">
               <a:lnSpc>
-                <a:spcPts val="2800"/>
+                <a:spcPts val="3079"/>
               </a:lnSpc>
               <a:spcBef>
                 <a:spcPct val="0"/>
@@ -7603,8 +7603,8 @@
         </p:nvSpPr>
         <p:spPr>
           <a:xfrm rot="0">
-            <a:off x="1028700" y="1504950"/>
-            <a:ext cx="5446486" cy="698499"/>
+            <a:off x="1028700" y="2043985"/>
+            <a:ext cx="5446486" cy="1749425"/>
           </a:xfrm>
           <a:prstGeom prst="rect">
             <a:avLst/>
@@ -7618,14 +7618,14 @@
           <a:p>
             <a:pPr algn="l" marL="0" indent="0" lvl="0">
               <a:lnSpc>
-                <a:spcPts val="5600"/>
+                <a:spcPts val="7000"/>
               </a:lnSpc>
               <a:spcBef>
                 <a:spcPct val="0"/>
               </a:spcBef>
             </a:pPr>
             <a:r>
-              <a:rPr lang="en-US" b="true" sz="4000" spc="280">
+              <a:rPr lang="en-US" b="true" sz="5000" spc="350">
                 <a:solidFill>
                   <a:srgbClr val="013D5A"/>
                 </a:solidFill>
@@ -7647,8 +7647,8 @@
         </p:nvSpPr>
         <p:spPr>
           <a:xfrm rot="0">
-            <a:off x="7999792" y="1637348"/>
-            <a:ext cx="2071629" cy="533399"/>
+            <a:off x="7999792" y="1646873"/>
+            <a:ext cx="2071629" cy="523874"/>
           </a:xfrm>
           <a:prstGeom prst="rect">
             <a:avLst/>
@@ -7691,8 +7691,8 @@
         </p:nvSpPr>
         <p:spPr>
           <a:xfrm rot="0">
-            <a:off x="7999792" y="4380071"/>
-            <a:ext cx="2071629" cy="533399"/>
+            <a:off x="7999792" y="4389596"/>
+            <a:ext cx="2071629" cy="523874"/>
           </a:xfrm>
           <a:prstGeom prst="rect">
             <a:avLst/>
@@ -7735,8 +7735,8 @@
         </p:nvSpPr>
         <p:spPr>
           <a:xfrm rot="0">
-            <a:off x="12801680" y="1637348"/>
-            <a:ext cx="2071629" cy="533399"/>
+            <a:off x="12801680" y="1646873"/>
+            <a:ext cx="2071629" cy="523874"/>
           </a:xfrm>
           <a:prstGeom prst="rect">
             <a:avLst/>
@@ -7779,8 +7779,8 @@
         </p:nvSpPr>
         <p:spPr>
           <a:xfrm rot="0">
-            <a:off x="12801680" y="4380071"/>
-            <a:ext cx="2071629" cy="533399"/>
+            <a:off x="12801680" y="4389596"/>
+            <a:ext cx="2071629" cy="523874"/>
           </a:xfrm>
           <a:prstGeom prst="rect">
             <a:avLst/>
@@ -7823,8 +7823,8 @@
         </p:nvSpPr>
         <p:spPr>
           <a:xfrm rot="0">
-            <a:off x="7999792" y="2946718"/>
-            <a:ext cx="4166837" cy="549910"/>
+            <a:off x="7999792" y="2927668"/>
+            <a:ext cx="4166837" cy="1308100"/>
           </a:xfrm>
           <a:prstGeom prst="rect">
             <a:avLst/>
@@ -7838,11 +7838,11 @@
           <a:p>
             <a:pPr algn="l">
               <a:lnSpc>
-                <a:spcPts val="2240"/>
+                <a:spcPts val="3499"/>
               </a:lnSpc>
             </a:pPr>
             <a:r>
-              <a:rPr lang="en-US" sz="1600" spc="32" b="true">
+              <a:rPr lang="en-US" sz="2499" spc="49" b="true">
                 <a:solidFill>
                   <a:srgbClr val="013D5A"/>
                 </a:solidFill>
@@ -7857,7 +7857,7 @@
           <a:p>
             <a:pPr algn="l" marL="0" indent="0" lvl="0">
               <a:lnSpc>
-                <a:spcPts val="2240"/>
+                <a:spcPts val="3499"/>
               </a:lnSpc>
               <a:spcBef>
                 <a:spcPct val="0"/>
@@ -7874,8 +7874,8 @@
         </p:nvSpPr>
         <p:spPr>
           <a:xfrm rot="0">
-            <a:off x="7999792" y="5689442"/>
-            <a:ext cx="4166837" cy="826135"/>
+            <a:off x="7999792" y="5670392"/>
+            <a:ext cx="4166837" cy="1308100"/>
           </a:xfrm>
           <a:prstGeom prst="rect">
             <a:avLst/>
@@ -7889,11 +7889,11 @@
           <a:p>
             <a:pPr algn="l">
               <a:lnSpc>
-                <a:spcPts val="2240"/>
+                <a:spcPts val="3499"/>
               </a:lnSpc>
             </a:pPr>
             <a:r>
-              <a:rPr lang="en-US" sz="1600" spc="32" b="true">
+              <a:rPr lang="en-US" sz="2499" spc="49" b="true">
                 <a:solidFill>
                   <a:srgbClr val="013D5A"/>
                 </a:solidFill>
@@ -7908,7 +7908,7 @@
           <a:p>
             <a:pPr algn="l" marL="0" indent="0" lvl="0">
               <a:lnSpc>
-                <a:spcPts val="2240"/>
+                <a:spcPts val="3499"/>
               </a:lnSpc>
               <a:spcBef>
                 <a:spcPct val="0"/>
@@ -7925,8 +7925,8 @@
         </p:nvSpPr>
         <p:spPr>
           <a:xfrm rot="0">
-            <a:off x="12801680" y="2946718"/>
-            <a:ext cx="4166837" cy="549910"/>
+            <a:off x="12801680" y="2927668"/>
+            <a:ext cx="4166837" cy="1308100"/>
           </a:xfrm>
           <a:prstGeom prst="rect">
             <a:avLst/>
@@ -7940,11 +7940,11 @@
           <a:p>
             <a:pPr algn="l">
               <a:lnSpc>
-                <a:spcPts val="2240"/>
+                <a:spcPts val="3499"/>
               </a:lnSpc>
             </a:pPr>
             <a:r>
-              <a:rPr lang="en-US" sz="1600" spc="32" b="true">
+              <a:rPr lang="en-US" sz="2499" spc="49" b="true">
                 <a:solidFill>
                   <a:srgbClr val="013D5A"/>
                 </a:solidFill>
@@ -7959,7 +7959,7 @@
           <a:p>
             <a:pPr algn="l" marL="0" indent="0" lvl="0">
               <a:lnSpc>
-                <a:spcPts val="2240"/>
+                <a:spcPts val="3499"/>
               </a:lnSpc>
               <a:spcBef>
                 <a:spcPct val="0"/>
@@ -7976,8 +7976,8 @@
         </p:nvSpPr>
         <p:spPr>
           <a:xfrm rot="0">
-            <a:off x="12801680" y="5689442"/>
-            <a:ext cx="4166837" cy="826135"/>
+            <a:off x="12801680" y="5670392"/>
+            <a:ext cx="4166837" cy="1308100"/>
           </a:xfrm>
           <a:prstGeom prst="rect">
             <a:avLst/>
@@ -7991,11 +7991,11 @@
           <a:p>
             <a:pPr algn="l">
               <a:lnSpc>
-                <a:spcPts val="2240"/>
+                <a:spcPts val="3499"/>
               </a:lnSpc>
             </a:pPr>
             <a:r>
-              <a:rPr lang="en-US" sz="1600" spc="32" b="true">
+              <a:rPr lang="en-US" sz="2499" spc="49" b="true">
                 <a:solidFill>
                   <a:srgbClr val="013D5A"/>
                 </a:solidFill>
@@ -8010,7 +8010,7 @@
           <a:p>
             <a:pPr algn="l" marL="0" indent="0" lvl="0">
               <a:lnSpc>
-                <a:spcPts val="2240"/>
+                <a:spcPts val="3499"/>
               </a:lnSpc>
               <a:spcBef>
                 <a:spcPct val="0"/>
@@ -8028,7 +8028,7 @@
         <p:spPr>
           <a:xfrm rot="0">
             <a:off x="7999792" y="2313621"/>
-            <a:ext cx="4457620" cy="358775"/>
+            <a:ext cx="4457620" cy="431800"/>
           </a:xfrm>
           <a:prstGeom prst="rect">
             <a:avLst/>
@@ -8042,14 +8042,14 @@
           <a:p>
             <a:pPr algn="l" marL="0" indent="0" lvl="0">
               <a:lnSpc>
-                <a:spcPts val="2800"/>
+                <a:spcPts val="3499"/>
               </a:lnSpc>
               <a:spcBef>
                 <a:spcPct val="0"/>
               </a:spcBef>
             </a:pPr>
             <a:r>
-              <a:rPr lang="en-US" b="true" sz="2000" i="true" spc="40">
+              <a:rPr lang="en-US" b="true" sz="2499" i="true" spc="49">
                 <a:solidFill>
                   <a:srgbClr val="895159"/>
                 </a:solidFill>
@@ -8072,7 +8072,7 @@
         <p:spPr>
           <a:xfrm rot="0">
             <a:off x="7999792" y="5056345"/>
-            <a:ext cx="4457620" cy="1063625"/>
+            <a:ext cx="4457620" cy="1308100"/>
           </a:xfrm>
           <a:prstGeom prst="rect">
             <a:avLst/>
@@ -8086,11 +8086,11 @@
           <a:p>
             <a:pPr algn="l">
               <a:lnSpc>
-                <a:spcPts val="2800"/>
+                <a:spcPts val="3499"/>
               </a:lnSpc>
             </a:pPr>
             <a:r>
-              <a:rPr lang="en-US" b="true" sz="2000" i="true" spc="40">
+              <a:rPr lang="en-US" b="true" sz="2499" i="true" spc="49">
                 <a:solidFill>
                   <a:srgbClr val="895159"/>
                 </a:solidFill>
@@ -8105,14 +8105,14 @@
           <a:p>
             <a:pPr algn="l">
               <a:lnSpc>
-                <a:spcPts val="2800"/>
+                <a:spcPts val="3499"/>
               </a:lnSpc>
             </a:pPr>
           </a:p>
           <a:p>
             <a:pPr algn="l" marL="0" indent="0" lvl="0">
               <a:lnSpc>
-                <a:spcPts val="2800"/>
+                <a:spcPts val="3499"/>
               </a:lnSpc>
               <a:spcBef>
                 <a:spcPct val="0"/>
@@ -8217,8 +8217,8 @@
         </p:nvSpPr>
         <p:spPr>
           <a:xfrm rot="0">
-            <a:off x="776258" y="6026309"/>
-            <a:ext cx="5446486" cy="2813049"/>
+            <a:off x="1028700" y="5027770"/>
+            <a:ext cx="5446486" cy="3540125"/>
           </a:xfrm>
           <a:prstGeom prst="rect">
             <a:avLst/>
@@ -8232,14 +8232,14 @@
           <a:p>
             <a:pPr algn="l" marL="0" indent="0" lvl="0">
               <a:lnSpc>
-                <a:spcPts val="5600"/>
+                <a:spcPts val="7000"/>
               </a:lnSpc>
               <a:spcBef>
                 <a:spcPct val="0"/>
               </a:spcBef>
             </a:pPr>
             <a:r>
-              <a:rPr lang="en-US" b="true" sz="4000" spc="280">
+              <a:rPr lang="en-US" b="true" sz="5000" spc="350">
                 <a:solidFill>
                   <a:srgbClr val="013D5A"/>
                 </a:solidFill>
@@ -8248,7 +8248,7 @@
                 <a:cs typeface="Now Heavy"/>
                 <a:sym typeface="Now Heavy"/>
               </a:rPr>
-              <a:t>SERVICE CYCLISTIC – INFORMATIONS GÉNÉRALES</a:t>
+              <a:t>SERVICE CYCLISTIC – INFOS GÉNÉRALES</a:t>
             </a:r>
           </a:p>
         </p:txBody>
@@ -8452,7 +8452,7 @@
         </p:nvGrpSpPr>
         <p:grpSpPr>
           <a:xfrm rot="0">
-            <a:off x="7369859" y="-238812"/>
+            <a:off x="7445500" y="-238812"/>
             <a:ext cx="11719943" cy="10525812"/>
             <a:chOff x="0" y="0"/>
             <a:chExt cx="3086734" cy="2772230"/>
@@ -8537,8 +8537,8 @@
         </p:nvSpPr>
         <p:spPr>
           <a:xfrm rot="0">
-            <a:off x="1028700" y="1504950"/>
-            <a:ext cx="5446486" cy="698499"/>
+            <a:off x="1028700" y="4932363"/>
+            <a:ext cx="5446486" cy="854075"/>
           </a:xfrm>
           <a:prstGeom prst="rect">
             <a:avLst/>
@@ -8552,14 +8552,14 @@
           <a:p>
             <a:pPr algn="l" marL="0" indent="0" lvl="0">
               <a:lnSpc>
-                <a:spcPts val="5600"/>
+                <a:spcPts val="7000"/>
               </a:lnSpc>
               <a:spcBef>
                 <a:spcPct val="0"/>
               </a:spcBef>
             </a:pPr>
             <a:r>
-              <a:rPr lang="en-US" b="true" sz="4000" spc="280">
+              <a:rPr lang="en-US" b="true" sz="5000" spc="350">
                 <a:solidFill>
                   <a:srgbClr val="013D5A"/>
                 </a:solidFill>
@@ -8581,8 +8581,8 @@
         </p:nvSpPr>
         <p:spPr>
           <a:xfrm rot="0">
-            <a:off x="7999792" y="1637348"/>
-            <a:ext cx="2071629" cy="533399"/>
+            <a:off x="7999792" y="1646873"/>
+            <a:ext cx="2071629" cy="523874"/>
           </a:xfrm>
           <a:prstGeom prst="rect">
             <a:avLst/>
@@ -8625,8 +8625,8 @@
         </p:nvSpPr>
         <p:spPr>
           <a:xfrm rot="0">
-            <a:off x="7999792" y="4380071"/>
-            <a:ext cx="2071629" cy="533399"/>
+            <a:off x="7999792" y="4389596"/>
+            <a:ext cx="2071629" cy="523874"/>
           </a:xfrm>
           <a:prstGeom prst="rect">
             <a:avLst/>
@@ -8669,8 +8669,8 @@
         </p:nvSpPr>
         <p:spPr>
           <a:xfrm rot="0">
-            <a:off x="7999792" y="7122795"/>
-            <a:ext cx="2071629" cy="533399"/>
+            <a:off x="7999792" y="7132320"/>
+            <a:ext cx="2071629" cy="523874"/>
           </a:xfrm>
           <a:prstGeom prst="rect">
             <a:avLst/>
@@ -8713,8 +8713,8 @@
         </p:nvSpPr>
         <p:spPr>
           <a:xfrm rot="0">
-            <a:off x="12801680" y="1637348"/>
-            <a:ext cx="2071629" cy="533399"/>
+            <a:off x="12801680" y="1646873"/>
+            <a:ext cx="2071629" cy="523874"/>
           </a:xfrm>
           <a:prstGeom prst="rect">
             <a:avLst/>
@@ -8757,8 +8757,8 @@
         </p:nvSpPr>
         <p:spPr>
           <a:xfrm rot="0">
-            <a:off x="12801680" y="4380071"/>
-            <a:ext cx="2071629" cy="533399"/>
+            <a:off x="12801680" y="4389596"/>
+            <a:ext cx="2071629" cy="523874"/>
           </a:xfrm>
           <a:prstGeom prst="rect">
             <a:avLst/>
@@ -8802,7 +8802,7 @@
         <p:spPr>
           <a:xfrm rot="0">
             <a:off x="7999792" y="2472371"/>
-            <a:ext cx="4457620" cy="711200"/>
+            <a:ext cx="4457620" cy="869950"/>
           </a:xfrm>
           <a:prstGeom prst="rect">
             <a:avLst/>
@@ -8816,11 +8816,11 @@
           <a:p>
             <a:pPr algn="l">
               <a:lnSpc>
-                <a:spcPts val="2800"/>
+                <a:spcPts val="3499"/>
               </a:lnSpc>
             </a:pPr>
             <a:r>
-              <a:rPr lang="en-US" b="true" sz="2000" i="true" spc="40">
+              <a:rPr lang="en-US" b="true" sz="2499" i="true" spc="49">
                 <a:solidFill>
                   <a:srgbClr val="895159"/>
                 </a:solidFill>
@@ -8835,7 +8835,7 @@
           <a:p>
             <a:pPr algn="l" marL="0" indent="0" lvl="0">
               <a:lnSpc>
-                <a:spcPts val="2800"/>
+                <a:spcPts val="3499"/>
               </a:lnSpc>
               <a:spcBef>
                 <a:spcPct val="0"/>
@@ -8853,7 +8853,7 @@
         <p:spPr>
           <a:xfrm rot="0">
             <a:off x="7999792" y="5086350"/>
-            <a:ext cx="4457620" cy="711200"/>
+            <a:ext cx="4457620" cy="1308100"/>
           </a:xfrm>
           <a:prstGeom prst="rect">
             <a:avLst/>
@@ -8867,14 +8867,14 @@
           <a:p>
             <a:pPr algn="l" marL="0" indent="0" lvl="0">
               <a:lnSpc>
-                <a:spcPts val="2800"/>
+                <a:spcPts val="3499"/>
               </a:lnSpc>
               <a:spcBef>
                 <a:spcPct val="0"/>
               </a:spcBef>
             </a:pPr>
             <a:r>
-              <a:rPr lang="en-US" b="true" sz="2000" i="true" spc="40">
+              <a:rPr lang="en-US" b="true" sz="2499" i="true" spc="49">
                 <a:solidFill>
                   <a:srgbClr val="895159"/>
                 </a:solidFill>
@@ -8889,7 +8889,7 @@
           <a:p>
             <a:pPr algn="l" marL="0" indent="0" lvl="0">
               <a:lnSpc>
-                <a:spcPts val="2800"/>
+                <a:spcPts val="3499"/>
               </a:lnSpc>
               <a:spcBef>
                 <a:spcPct val="0"/>
@@ -8907,7 +8907,7 @@
         <p:spPr>
           <a:xfrm rot="0">
             <a:off x="7999792" y="7827644"/>
-            <a:ext cx="4457620" cy="358775"/>
+            <a:ext cx="4457620" cy="448310"/>
           </a:xfrm>
           <a:prstGeom prst="rect">
             <a:avLst/>
@@ -8921,14 +8921,14 @@
           <a:p>
             <a:pPr algn="l" marL="0" indent="0" lvl="0">
               <a:lnSpc>
-                <a:spcPts val="2800"/>
+                <a:spcPts val="3639"/>
               </a:lnSpc>
               <a:spcBef>
                 <a:spcPct val="0"/>
               </a:spcBef>
             </a:pPr>
             <a:r>
-              <a:rPr lang="en-US" b="true" sz="2000" i="true" spc="40">
+              <a:rPr lang="en-US" b="true" sz="2599" i="true" spc="51">
                 <a:solidFill>
                   <a:srgbClr val="895159"/>
                 </a:solidFill>
@@ -8951,7 +8951,7 @@
         <p:spPr>
           <a:xfrm rot="0">
             <a:off x="12801680" y="2472371"/>
-            <a:ext cx="4457620" cy="711200"/>
+            <a:ext cx="4457620" cy="1308100"/>
           </a:xfrm>
           <a:prstGeom prst="rect">
             <a:avLst/>
@@ -8965,11 +8965,11 @@
           <a:p>
             <a:pPr algn="l">
               <a:lnSpc>
-                <a:spcPts val="2800"/>
+                <a:spcPts val="3499"/>
               </a:lnSpc>
             </a:pPr>
             <a:r>
-              <a:rPr lang="en-US" b="true" sz="2000" i="true" spc="40">
+              <a:rPr lang="en-US" b="true" sz="2499" i="true" spc="49">
                 <a:solidFill>
                   <a:srgbClr val="895159"/>
                 </a:solidFill>
@@ -8984,7 +8984,7 @@
           <a:p>
             <a:pPr algn="l" marL="0" indent="0" lvl="0">
               <a:lnSpc>
-                <a:spcPts val="2800"/>
+                <a:spcPts val="3499"/>
               </a:lnSpc>
               <a:spcBef>
                 <a:spcPct val="0"/>
@@ -9002,7 +9002,7 @@
         <p:spPr>
           <a:xfrm rot="0">
             <a:off x="12801680" y="5111750"/>
-            <a:ext cx="4457620" cy="358775"/>
+            <a:ext cx="4457620" cy="431800"/>
           </a:xfrm>
           <a:prstGeom prst="rect">
             <a:avLst/>
@@ -9016,14 +9016,14 @@
           <a:p>
             <a:pPr algn="l" marL="0" indent="0" lvl="0">
               <a:lnSpc>
-                <a:spcPts val="2800"/>
+                <a:spcPts val="3499"/>
               </a:lnSpc>
               <a:spcBef>
                 <a:spcPct val="0"/>
               </a:spcBef>
             </a:pPr>
             <a:r>
-              <a:rPr lang="en-US" b="true" sz="2000" i="true" spc="40">
+              <a:rPr lang="en-US" b="true" sz="2499" i="true" spc="49">
                 <a:solidFill>
                   <a:srgbClr val="895159"/>
                 </a:solidFill>
@@ -9236,7 +9236,7 @@
         </p:nvGrpSpPr>
         <p:grpSpPr>
           <a:xfrm rot="0">
-            <a:off x="6475186" y="0"/>
+            <a:off x="6551004" y="-121025"/>
             <a:ext cx="11812814" cy="10287000"/>
             <a:chOff x="0" y="0"/>
             <a:chExt cx="3111194" cy="2709333"/>
@@ -9321,8 +9321,8 @@
         </p:nvSpPr>
         <p:spPr>
           <a:xfrm rot="0">
-            <a:off x="1028700" y="1504950"/>
-            <a:ext cx="5446486" cy="698499"/>
+            <a:off x="1028700" y="4673600"/>
+            <a:ext cx="5446486" cy="854075"/>
           </a:xfrm>
           <a:prstGeom prst="rect">
             <a:avLst/>
@@ -9336,14 +9336,14 @@
           <a:p>
             <a:pPr algn="l" marL="0" indent="0" lvl="0">
               <a:lnSpc>
-                <a:spcPts val="5600"/>
+                <a:spcPts val="7000"/>
               </a:lnSpc>
               <a:spcBef>
                 <a:spcPct val="0"/>
               </a:spcBef>
             </a:pPr>
             <a:r>
-              <a:rPr lang="en-US" b="true" sz="4000" spc="280">
+              <a:rPr lang="en-US" b="true" sz="5000" spc="350">
                 <a:solidFill>
                   <a:srgbClr val="013D5A"/>
                 </a:solidFill>
@@ -9365,8 +9365,8 @@
         </p:nvSpPr>
         <p:spPr>
           <a:xfrm rot="0">
-            <a:off x="7999792" y="1637348"/>
-            <a:ext cx="4643382" cy="1066799"/>
+            <a:off x="7999792" y="1646873"/>
+            <a:ext cx="4643382" cy="1057274"/>
           </a:xfrm>
           <a:prstGeom prst="rect">
             <a:avLst/>
@@ -9416,8 +9416,8 @@
         </p:nvSpPr>
         <p:spPr>
           <a:xfrm rot="0">
-            <a:off x="7999792" y="2380154"/>
-            <a:ext cx="9259508" cy="1063625"/>
+            <a:off x="7999792" y="3214210"/>
+            <a:ext cx="9259508" cy="1746250"/>
           </a:xfrm>
           <a:prstGeom prst="rect">
             <a:avLst/>
@@ -9431,11 +9431,11 @@
           <a:p>
             <a:pPr algn="l">
               <a:lnSpc>
-                <a:spcPts val="2800"/>
+                <a:spcPts val="3499"/>
               </a:lnSpc>
             </a:pPr>
             <a:r>
-              <a:rPr lang="en-US" sz="2000" i="true" spc="40">
+              <a:rPr lang="en-US" sz="2499" i="true" spc="49">
                 <a:solidFill>
                   <a:srgbClr val="895159"/>
                 </a:solidFill>
@@ -9450,7 +9450,7 @@
           <a:p>
             <a:pPr algn="l" marL="0" indent="0" lvl="0">
               <a:lnSpc>
-                <a:spcPts val="2800"/>
+                <a:spcPts val="3499"/>
               </a:lnSpc>
               <a:spcBef>
                 <a:spcPct val="0"/>
@@ -9467,8 +9467,8 @@
         </p:nvSpPr>
         <p:spPr>
           <a:xfrm rot="0">
-            <a:off x="7999792" y="3822358"/>
-            <a:ext cx="4457620" cy="711200"/>
+            <a:off x="7999792" y="4965325"/>
+            <a:ext cx="4457620" cy="869950"/>
           </a:xfrm>
           <a:prstGeom prst="rect">
             <a:avLst/>
@@ -9482,14 +9482,14 @@
           <a:p>
             <a:pPr algn="l" marL="0" indent="0" lvl="0">
               <a:lnSpc>
-                <a:spcPts val="2800"/>
+                <a:spcPts val="3499"/>
               </a:lnSpc>
               <a:spcBef>
                 <a:spcPct val="0"/>
               </a:spcBef>
             </a:pPr>
             <a:r>
-              <a:rPr lang="en-US" sz="2000" i="true" spc="40">
+              <a:rPr lang="en-US" sz="2499" i="true" spc="49">
                 <a:solidFill>
                   <a:srgbClr val="895159"/>
                 </a:solidFill>
@@ -9504,7 +9504,7 @@
           <a:p>
             <a:pPr algn="l" marL="0" indent="0" lvl="0">
               <a:lnSpc>
-                <a:spcPts val="2800"/>
+                <a:spcPts val="3499"/>
               </a:lnSpc>
               <a:spcBef>
                 <a:spcPct val="0"/>
@@ -9521,8 +9521,8 @@
         </p:nvSpPr>
         <p:spPr>
           <a:xfrm rot="0">
-            <a:off x="7999792" y="4432300"/>
-            <a:ext cx="4457620" cy="711200"/>
+            <a:off x="7999792" y="5470525"/>
+            <a:ext cx="4457620" cy="1253490"/>
           </a:xfrm>
           <a:prstGeom prst="rect">
             <a:avLst/>
@@ -9536,14 +9536,14 @@
           <a:p>
             <a:pPr algn="l" marL="0" indent="0" lvl="0">
               <a:lnSpc>
-                <a:spcPts val="2800"/>
+                <a:spcPts val="3359"/>
               </a:lnSpc>
               <a:spcBef>
                 <a:spcPct val="0"/>
               </a:spcBef>
             </a:pPr>
             <a:r>
-              <a:rPr lang="en-US" sz="2000" i="true" spc="40">
+              <a:rPr lang="en-US" sz="2399" i="true" spc="47">
                 <a:solidFill>
                   <a:srgbClr val="895159"/>
                 </a:solidFill>
@@ -9558,7 +9558,7 @@
           <a:p>
             <a:pPr algn="l" marL="0" indent="0" lvl="0">
               <a:lnSpc>
-                <a:spcPts val="2800"/>
+                <a:spcPts val="3359"/>
               </a:lnSpc>
               <a:spcBef>
                 <a:spcPct val="0"/>
@@ -9575,8 +9575,8 @@
         </p:nvSpPr>
         <p:spPr>
           <a:xfrm rot="0">
-            <a:off x="7999792" y="5740400"/>
-            <a:ext cx="4457620" cy="711200"/>
+            <a:off x="7999792" y="7238365"/>
+            <a:ext cx="4457620" cy="834390"/>
           </a:xfrm>
           <a:prstGeom prst="rect">
             <a:avLst/>
@@ -9590,14 +9590,14 @@
           <a:p>
             <a:pPr algn="l" marL="0" indent="0" lvl="0">
               <a:lnSpc>
-                <a:spcPts val="2800"/>
+                <a:spcPts val="3359"/>
               </a:lnSpc>
               <a:spcBef>
                 <a:spcPct val="0"/>
               </a:spcBef>
             </a:pPr>
             <a:r>
-              <a:rPr lang="en-US" sz="2000" i="true" spc="40">
+              <a:rPr lang="en-US" sz="2399" i="true" spc="47">
                 <a:solidFill>
                   <a:srgbClr val="895159"/>
                 </a:solidFill>
@@ -9612,7 +9612,7 @@
           <a:p>
             <a:pPr algn="l" marL="0" indent="0" lvl="0">
               <a:lnSpc>
-                <a:spcPts val="2800"/>
+                <a:spcPts val="3359"/>
               </a:lnSpc>
               <a:spcBef>
                 <a:spcPct val="0"/>
@@ -9629,8 +9629,8 @@
         </p:nvSpPr>
         <p:spPr>
           <a:xfrm rot="0">
-            <a:off x="7999792" y="5086350"/>
-            <a:ext cx="4457620" cy="711200"/>
+            <a:off x="7999792" y="6349625"/>
+            <a:ext cx="4457620" cy="1253490"/>
           </a:xfrm>
           <a:prstGeom prst="rect">
             <a:avLst/>
@@ -9644,14 +9644,14 @@
           <a:p>
             <a:pPr algn="l" marL="0" indent="0" lvl="0">
               <a:lnSpc>
-                <a:spcPts val="2800"/>
+                <a:spcPts val="3359"/>
               </a:lnSpc>
               <a:spcBef>
                 <a:spcPct val="0"/>
               </a:spcBef>
             </a:pPr>
             <a:r>
-              <a:rPr lang="en-US" sz="2000" i="true" spc="40">
+              <a:rPr lang="en-US" sz="2399" i="true" spc="47">
                 <a:solidFill>
                   <a:srgbClr val="895159"/>
                 </a:solidFill>
@@ -9666,7 +9666,7 @@
           <a:p>
             <a:pPr algn="l" marL="0" indent="0" lvl="0">
               <a:lnSpc>
-                <a:spcPts val="2800"/>
+                <a:spcPts val="3359"/>
               </a:lnSpc>
               <a:spcBef>
                 <a:spcPct val="0"/>
@@ -10510,8 +10510,8 @@
         </p:nvSpPr>
         <p:spPr>
           <a:xfrm rot="0">
-            <a:off x="1028700" y="1128712"/>
-            <a:ext cx="8115300" cy="1403349"/>
+            <a:off x="1028700" y="1138237"/>
+            <a:ext cx="8115300" cy="1393824"/>
           </a:xfrm>
           <a:prstGeom prst="rect">
             <a:avLst/>
@@ -10693,8 +10693,8 @@
         </p:nvSpPr>
         <p:spPr>
           <a:xfrm rot="0">
-            <a:off x="11601470" y="5384837"/>
-            <a:ext cx="1487763" cy="621816"/>
+            <a:off x="11601470" y="5394362"/>
+            <a:ext cx="1487763" cy="612291"/>
           </a:xfrm>
           <a:prstGeom prst="rect">
             <a:avLst/>
@@ -10737,7 +10737,7 @@
         </p:nvSpPr>
         <p:spPr>
           <a:xfrm rot="0">
-            <a:off x="15121881" y="5389688"/>
+            <a:off x="14997224" y="5421968"/>
             <a:ext cx="1399741" cy="570485"/>
           </a:xfrm>
           <a:prstGeom prst="rect">
@@ -11013,8 +11013,8 @@
         </p:nvSpPr>
         <p:spPr>
           <a:xfrm rot="0">
-            <a:off x="11350235" y="5370638"/>
-            <a:ext cx="1878279" cy="621816"/>
+            <a:off x="11350235" y="5380163"/>
+            <a:ext cx="1878279" cy="612291"/>
           </a:xfrm>
           <a:prstGeom prst="rect">
             <a:avLst/>
@@ -11057,8 +11057,8 @@
         </p:nvSpPr>
         <p:spPr>
           <a:xfrm rot="0">
-            <a:off x="13089233" y="5607424"/>
-            <a:ext cx="1349021" cy="195868"/>
+            <a:off x="13089233" y="5605488"/>
+            <a:ext cx="1349021" cy="199740"/>
           </a:xfrm>
           <a:prstGeom prst="rect">
             <a:avLst/>
@@ -11320,8 +11320,8 @@
         </p:nvSpPr>
         <p:spPr>
           <a:xfrm rot="0">
-            <a:off x="14997224" y="8268541"/>
-            <a:ext cx="1564753" cy="552945"/>
+            <a:off x="14997224" y="8278066"/>
+            <a:ext cx="1564753" cy="543420"/>
           </a:xfrm>
           <a:prstGeom prst="rect">
             <a:avLst/>
@@ -11627,8 +11627,8 @@
         </p:nvSpPr>
         <p:spPr>
           <a:xfrm rot="0">
-            <a:off x="11601470" y="8268541"/>
-            <a:ext cx="1573321" cy="552945"/>
+            <a:off x="11601470" y="8278066"/>
+            <a:ext cx="1573321" cy="543420"/>
           </a:xfrm>
           <a:prstGeom prst="rect">
             <a:avLst/>
@@ -11716,7 +11716,7 @@
         <p:spPr>
           <a:xfrm rot="0">
             <a:off x="12062712" y="3970971"/>
-            <a:ext cx="4895442" cy="711200"/>
+            <a:ext cx="4895442" cy="1308100"/>
           </a:xfrm>
           <a:prstGeom prst="rect">
             <a:avLst/>
@@ -11728,9 +11728,9 @@
           </a:bodyPr>
           <a:lstStyle/>
           <a:p>
-            <a:pPr algn="l" marL="431801" indent="-215900" lvl="1">
+            <a:pPr algn="l" marL="539748" indent="-269874" lvl="1">
               <a:lnSpc>
-                <a:spcPts val="2800"/>
+                <a:spcPts val="3499"/>
               </a:lnSpc>
               <a:spcBef>
                 <a:spcPct val="0"/>
@@ -11739,7 +11739,7 @@
               <a:buChar char="•"/>
             </a:pPr>
             <a:r>
-              <a:rPr lang="en-US" b="true" sz="2000" i="true" spc="40">
+              <a:rPr lang="en-US" b="true" sz="2499" i="true" spc="49">
                 <a:solidFill>
                   <a:srgbClr val="895159"/>
                 </a:solidFill>
@@ -11754,7 +11754,7 @@
           <a:p>
             <a:pPr algn="l" marL="0" indent="0" lvl="0">
               <a:lnSpc>
-                <a:spcPts val="2800"/>
+                <a:spcPts val="3499"/>
               </a:lnSpc>
               <a:spcBef>
                 <a:spcPct val="0"/>
@@ -11771,8 +11771,8 @@
         </p:nvSpPr>
         <p:spPr>
           <a:xfrm rot="0">
-            <a:off x="11616940" y="6914422"/>
-            <a:ext cx="5642628" cy="711200"/>
+            <a:off x="11597735" y="6865863"/>
+            <a:ext cx="5642628" cy="1308100"/>
           </a:xfrm>
           <a:prstGeom prst="rect">
             <a:avLst/>
@@ -11784,9 +11784,9 @@
           </a:bodyPr>
           <a:lstStyle/>
           <a:p>
-            <a:pPr algn="l" marL="431801" indent="-215900" lvl="1">
+            <a:pPr algn="l" marL="539748" indent="-269874" lvl="1">
               <a:lnSpc>
-                <a:spcPts val="2800"/>
+                <a:spcPts val="3499"/>
               </a:lnSpc>
               <a:spcBef>
                 <a:spcPct val="0"/>
@@ -11795,7 +11795,7 @@
               <a:buChar char="•"/>
             </a:pPr>
             <a:r>
-              <a:rPr lang="en-US" b="true" sz="2000" i="true" spc="40">
+              <a:rPr lang="en-US" b="true" sz="2499" i="true" spc="49">
                 <a:solidFill>
                   <a:srgbClr val="895159"/>
                 </a:solidFill>
@@ -11810,7 +11810,7 @@
           <a:p>
             <a:pPr algn="l" marL="0" indent="0" lvl="0">
               <a:lnSpc>
-                <a:spcPts val="2800"/>
+                <a:spcPts val="3499"/>
               </a:lnSpc>
               <a:spcBef>
                 <a:spcPct val="0"/>
@@ -12009,8 +12009,8 @@
         </p:nvSpPr>
         <p:spPr>
           <a:xfrm rot="0">
-            <a:off x="1028700" y="1128712"/>
-            <a:ext cx="11458671" cy="698499"/>
+            <a:off x="1028700" y="1138237"/>
+            <a:ext cx="11458671" cy="688974"/>
           </a:xfrm>
           <a:prstGeom prst="rect">
             <a:avLst/>
@@ -12265,8 +12265,8 @@
           </p:nvSpPr>
           <p:spPr>
             <a:xfrm>
-              <a:off x="0" y="-38100"/>
-              <a:ext cx="2021828" cy="473529"/>
+              <a:off x="0" y="-28575"/>
+              <a:ext cx="2021828" cy="464004"/>
             </a:xfrm>
             <a:prstGeom prst="rect">
               <a:avLst/>
@@ -12533,8 +12533,8 @@
           </p:nvSpPr>
           <p:spPr>
             <a:xfrm>
-              <a:off x="0" y="-38100"/>
-              <a:ext cx="2126912" cy="516508"/>
+              <a:off x="0" y="-28575"/>
+              <a:ext cx="2126912" cy="506983"/>
             </a:xfrm>
             <a:prstGeom prst="rect">
               <a:avLst/>
@@ -12782,8 +12782,8 @@
           </p:nvSpPr>
           <p:spPr>
             <a:xfrm>
-              <a:off x="0" y="-38100"/>
-              <a:ext cx="2126912" cy="516508"/>
+              <a:off x="0" y="-28575"/>
+              <a:ext cx="2126912" cy="506983"/>
             </a:xfrm>
             <a:prstGeom prst="rect">
               <a:avLst/>
@@ -13633,8 +13633,8 @@
           </p:nvSpPr>
           <p:spPr>
             <a:xfrm>
-              <a:off x="0" y="-38100"/>
-              <a:ext cx="2126912" cy="516508"/>
+              <a:off x="0" y="-28575"/>
+              <a:ext cx="2126912" cy="506983"/>
             </a:xfrm>
             <a:prstGeom prst="rect">
               <a:avLst/>
@@ -14170,8 +14170,8 @@
           </p:nvSpPr>
           <p:spPr>
             <a:xfrm>
-              <a:off x="0" y="-38100"/>
-              <a:ext cx="2126912" cy="516508"/>
+              <a:off x="0" y="-28575"/>
+              <a:ext cx="2126912" cy="506983"/>
             </a:xfrm>
             <a:prstGeom prst="rect">
               <a:avLst/>
@@ -14463,8 +14463,8 @@
         </p:nvSpPr>
         <p:spPr>
           <a:xfrm rot="0">
-            <a:off x="1028700" y="1128712"/>
-            <a:ext cx="11458671" cy="698499"/>
+            <a:off x="1028700" y="1138237"/>
+            <a:ext cx="11458671" cy="688974"/>
           </a:xfrm>
           <a:prstGeom prst="rect">
             <a:avLst/>
@@ -14847,8 +14847,8 @@
           </p:nvSpPr>
           <p:spPr>
             <a:xfrm>
-              <a:off x="0" y="-38100"/>
-              <a:ext cx="2126912" cy="516508"/>
+              <a:off x="0" y="-28575"/>
+              <a:ext cx="2126912" cy="506983"/>
             </a:xfrm>
             <a:prstGeom prst="rect">
               <a:avLst/>
@@ -15550,8 +15550,8 @@
           </p:nvSpPr>
           <p:spPr>
             <a:xfrm>
-              <a:off x="0" y="-38100"/>
-              <a:ext cx="2126912" cy="516508"/>
+              <a:off x="0" y="-28575"/>
+              <a:ext cx="2126912" cy="506983"/>
             </a:xfrm>
             <a:prstGeom prst="rect">
               <a:avLst/>
@@ -16087,8 +16087,8 @@
           </p:nvSpPr>
           <p:spPr>
             <a:xfrm>
-              <a:off x="0" y="-38100"/>
-              <a:ext cx="2126912" cy="516508"/>
+              <a:off x="0" y="-28575"/>
+              <a:ext cx="2126912" cy="506983"/>
             </a:xfrm>
             <a:prstGeom prst="rect">
               <a:avLst/>
@@ -16334,8 +16334,8 @@
         </p:nvSpPr>
         <p:spPr>
           <a:xfrm rot="0">
-            <a:off x="1028700" y="1128712"/>
-            <a:ext cx="11458671" cy="698499"/>
+            <a:off x="1028700" y="1138237"/>
+            <a:ext cx="11458671" cy="688974"/>
           </a:xfrm>
           <a:prstGeom prst="rect">
             <a:avLst/>
@@ -16718,8 +16718,8 @@
           </p:nvSpPr>
           <p:spPr>
             <a:xfrm>
-              <a:off x="0" y="-38100"/>
-              <a:ext cx="2126912" cy="516508"/>
+              <a:off x="0" y="-28575"/>
+              <a:ext cx="2126912" cy="506983"/>
             </a:xfrm>
             <a:prstGeom prst="rect">
               <a:avLst/>
@@ -17425,8 +17425,8 @@
           </p:nvSpPr>
           <p:spPr>
             <a:xfrm>
-              <a:off x="0" y="-38100"/>
-              <a:ext cx="2126912" cy="566443"/>
+              <a:off x="0" y="-28575"/>
+              <a:ext cx="2126912" cy="556918"/>
             </a:xfrm>
             <a:prstGeom prst="rect">
               <a:avLst/>
@@ -18022,8 +18022,8 @@
           </p:nvSpPr>
           <p:spPr>
             <a:xfrm>
-              <a:off x="0" y="-38100"/>
-              <a:ext cx="2126912" cy="516508"/>
+              <a:off x="0" y="-28575"/>
+              <a:ext cx="2126912" cy="506983"/>
             </a:xfrm>
             <a:prstGeom prst="rect">
               <a:avLst/>
@@ -18397,8 +18397,8 @@
         </p:nvSpPr>
         <p:spPr>
           <a:xfrm rot="0">
-            <a:off x="1028700" y="1128712"/>
-            <a:ext cx="13390349" cy="698499"/>
+            <a:off x="1028700" y="1138237"/>
+            <a:ext cx="13390349" cy="688974"/>
           </a:xfrm>
           <a:prstGeom prst="rect">
             <a:avLst/>
